--- a/arduino/DownloadAndInstall.pptx
+++ b/arduino/DownloadAndInstall.pptx
@@ -5,7 +5,7 @@
     <p:sldMasterId id="2147483648" r:id="rId1"/>
   </p:sldMasterIdLst>
   <p:notesMasterIdLst>
-    <p:notesMasterId r:id="rId11"/>
+    <p:notesMasterId r:id="rId14"/>
   </p:notesMasterIdLst>
   <p:sldIdLst>
     <p:sldId id="256" r:id="rId2"/>
@@ -17,6 +17,9 @@
     <p:sldId id="263" r:id="rId8"/>
     <p:sldId id="259" r:id="rId9"/>
     <p:sldId id="264" r:id="rId10"/>
+    <p:sldId id="265" r:id="rId11"/>
+    <p:sldId id="266" r:id="rId12"/>
+    <p:sldId id="267" r:id="rId13"/>
   </p:sldIdLst>
   <p:sldSz cx="12192000" cy="6858000"/>
   <p:notesSz cx="6858000" cy="9144000"/>
@@ -205,7 +208,7 @@
           <a:p>
             <a:fld id="{1EF02920-5C20-4837-9E46-7A4CB2376DE0}" type="datetimeFigureOut">
               <a:rPr lang="en-US" smtClean="0"/>
-              <a:t>5/30/2024</a:t>
+              <a:t>4/1/2026</a:t>
             </a:fld>
             <a:endParaRPr lang="en-US"/>
           </a:p>
@@ -712,7 +715,7 @@
           <a:p>
             <a:fld id="{D9DFAD3B-25E2-4BDE-9F2C-20A6CF51609D}" type="datetimeFigureOut">
               <a:rPr lang="en-US" smtClean="0"/>
-              <a:t>5/30/2024</a:t>
+              <a:t>4/1/2026</a:t>
             </a:fld>
             <a:endParaRPr lang="en-US"/>
           </a:p>
@@ -910,7 +913,7 @@
           <a:p>
             <a:fld id="{D9DFAD3B-25E2-4BDE-9F2C-20A6CF51609D}" type="datetimeFigureOut">
               <a:rPr lang="en-US" smtClean="0"/>
-              <a:t>5/30/2024</a:t>
+              <a:t>4/1/2026</a:t>
             </a:fld>
             <a:endParaRPr lang="en-US"/>
           </a:p>
@@ -1118,7 +1121,7 @@
           <a:p>
             <a:fld id="{D9DFAD3B-25E2-4BDE-9F2C-20A6CF51609D}" type="datetimeFigureOut">
               <a:rPr lang="en-US" smtClean="0"/>
-              <a:t>5/30/2024</a:t>
+              <a:t>4/1/2026</a:t>
             </a:fld>
             <a:endParaRPr lang="en-US"/>
           </a:p>
@@ -1316,7 +1319,7 @@
           <a:p>
             <a:fld id="{D9DFAD3B-25E2-4BDE-9F2C-20A6CF51609D}" type="datetimeFigureOut">
               <a:rPr lang="en-US" smtClean="0"/>
-              <a:t>5/30/2024</a:t>
+              <a:t>4/1/2026</a:t>
             </a:fld>
             <a:endParaRPr lang="en-US"/>
           </a:p>
@@ -1591,7 +1594,7 @@
           <a:p>
             <a:fld id="{D9DFAD3B-25E2-4BDE-9F2C-20A6CF51609D}" type="datetimeFigureOut">
               <a:rPr lang="en-US" smtClean="0"/>
-              <a:t>5/30/2024</a:t>
+              <a:t>4/1/2026</a:t>
             </a:fld>
             <a:endParaRPr lang="en-US"/>
           </a:p>
@@ -1856,7 +1859,7 @@
           <a:p>
             <a:fld id="{D9DFAD3B-25E2-4BDE-9F2C-20A6CF51609D}" type="datetimeFigureOut">
               <a:rPr lang="en-US" smtClean="0"/>
-              <a:t>5/30/2024</a:t>
+              <a:t>4/1/2026</a:t>
             </a:fld>
             <a:endParaRPr lang="en-US"/>
           </a:p>
@@ -2268,7 +2271,7 @@
           <a:p>
             <a:fld id="{D9DFAD3B-25E2-4BDE-9F2C-20A6CF51609D}" type="datetimeFigureOut">
               <a:rPr lang="en-US" smtClean="0"/>
-              <a:t>5/30/2024</a:t>
+              <a:t>4/1/2026</a:t>
             </a:fld>
             <a:endParaRPr lang="en-US"/>
           </a:p>
@@ -2409,7 +2412,7 @@
           <a:p>
             <a:fld id="{D9DFAD3B-25E2-4BDE-9F2C-20A6CF51609D}" type="datetimeFigureOut">
               <a:rPr lang="en-US" smtClean="0"/>
-              <a:t>5/30/2024</a:t>
+              <a:t>4/1/2026</a:t>
             </a:fld>
             <a:endParaRPr lang="en-US"/>
           </a:p>
@@ -2522,7 +2525,7 @@
           <a:p>
             <a:fld id="{D9DFAD3B-25E2-4BDE-9F2C-20A6CF51609D}" type="datetimeFigureOut">
               <a:rPr lang="en-US" smtClean="0"/>
-              <a:t>5/30/2024</a:t>
+              <a:t>4/1/2026</a:t>
             </a:fld>
             <a:endParaRPr lang="en-US"/>
           </a:p>
@@ -2833,7 +2836,7 @@
           <a:p>
             <a:fld id="{D9DFAD3B-25E2-4BDE-9F2C-20A6CF51609D}" type="datetimeFigureOut">
               <a:rPr lang="en-US" smtClean="0"/>
-              <a:t>5/30/2024</a:t>
+              <a:t>4/1/2026</a:t>
             </a:fld>
             <a:endParaRPr lang="en-US"/>
           </a:p>
@@ -3121,7 +3124,7 @@
           <a:p>
             <a:fld id="{D9DFAD3B-25E2-4BDE-9F2C-20A6CF51609D}" type="datetimeFigureOut">
               <a:rPr lang="en-US" smtClean="0"/>
-              <a:t>5/30/2024</a:t>
+              <a:t>4/1/2026</a:t>
             </a:fld>
             <a:endParaRPr lang="en-US"/>
           </a:p>
@@ -3362,7 +3365,7 @@
           <a:p>
             <a:fld id="{D9DFAD3B-25E2-4BDE-9F2C-20A6CF51609D}" type="datetimeFigureOut">
               <a:rPr lang="en-US" smtClean="0"/>
-              <a:t>5/30/2024</a:t>
+              <a:t>4/1/2026</a:t>
             </a:fld>
             <a:endParaRPr lang="en-US"/>
           </a:p>
@@ -3822,6 +3825,414 @@
 </p:sld>
 </file>
 
+<file path=ppt/slides/slide10.xml><?xml version="1.0" encoding="utf-8"?>
+<p:sld xmlns:a="http://schemas.openxmlformats.org/drawingml/2006/main" xmlns:r="http://schemas.openxmlformats.org/officeDocument/2006/relationships" xmlns:p="http://schemas.openxmlformats.org/presentationml/2006/main">
+  <p:cSld>
+    <p:spTree>
+      <p:nvGrpSpPr>
+        <p:cNvPr id="1" name=""/>
+        <p:cNvGrpSpPr/>
+        <p:nvPr/>
+      </p:nvGrpSpPr>
+      <p:grpSpPr>
+        <a:xfrm>
+          <a:off x="0" y="0"/>
+          <a:ext cx="0" cy="0"/>
+          <a:chOff x="0" y="0"/>
+          <a:chExt cx="0" cy="0"/>
+        </a:xfrm>
+      </p:grpSpPr>
+      <p:pic>
+        <p:nvPicPr>
+          <p:cNvPr id="5" name="Picture 4">
+            <a:extLst>
+              <a:ext uri="{FF2B5EF4-FFF2-40B4-BE49-F238E27FC236}">
+                <a16:creationId xmlns:a16="http://schemas.microsoft.com/office/drawing/2014/main" id="{ED39AF4B-7028-9CC9-F6D8-F2D0FAB55E52}"/>
+              </a:ext>
+            </a:extLst>
+          </p:cNvPr>
+          <p:cNvPicPr>
+            <a:picLocks noChangeAspect="1"/>
+          </p:cNvPicPr>
+          <p:nvPr/>
+        </p:nvPicPr>
+        <p:blipFill>
+          <a:blip r:embed="rId2"/>
+          <a:stretch>
+            <a:fillRect/>
+          </a:stretch>
+        </p:blipFill>
+        <p:spPr>
+          <a:xfrm>
+            <a:off x="2221953" y="1564546"/>
+            <a:ext cx="6460733" cy="3825380"/>
+          </a:xfrm>
+          <a:prstGeom prst="rect">
+            <a:avLst/>
+          </a:prstGeom>
+        </p:spPr>
+      </p:pic>
+      <p:cxnSp>
+        <p:nvCxnSpPr>
+          <p:cNvPr id="6" name="Straight Connector 5">
+            <a:extLst>
+              <a:ext uri="{FF2B5EF4-FFF2-40B4-BE49-F238E27FC236}">
+                <a16:creationId xmlns:a16="http://schemas.microsoft.com/office/drawing/2014/main" id="{53631675-1A91-E3F1-8A64-BAC161C05105}"/>
+              </a:ext>
+            </a:extLst>
+          </p:cNvPr>
+          <p:cNvCxnSpPr>
+            <a:cxnSpLocks/>
+          </p:cNvCxnSpPr>
+          <p:nvPr/>
+        </p:nvCxnSpPr>
+        <p:spPr>
+          <a:xfrm flipH="1" flipV="1">
+            <a:off x="4514923" y="2150354"/>
+            <a:ext cx="367382" cy="215342"/>
+          </a:xfrm>
+          <a:prstGeom prst="line">
+            <a:avLst/>
+          </a:prstGeom>
+          <a:ln w="25400">
+            <a:solidFill>
+              <a:srgbClr val="FFC000"/>
+            </a:solidFill>
+            <a:headEnd type="none" w="med" len="med"/>
+            <a:tailEnd type="oval" w="med" len="med"/>
+          </a:ln>
+        </p:spPr>
+        <p:style>
+          <a:lnRef idx="1">
+            <a:schemeClr val="accent1"/>
+          </a:lnRef>
+          <a:fillRef idx="0">
+            <a:schemeClr val="accent1"/>
+          </a:fillRef>
+          <a:effectRef idx="0">
+            <a:schemeClr val="accent1"/>
+          </a:effectRef>
+          <a:fontRef idx="minor">
+            <a:schemeClr val="tx1"/>
+          </a:fontRef>
+        </p:style>
+      </p:cxnSp>
+      <p:sp>
+        <p:nvSpPr>
+          <p:cNvPr id="7" name="Rectangle: Rounded Corners 6">
+            <a:extLst>
+              <a:ext uri="{FF2B5EF4-FFF2-40B4-BE49-F238E27FC236}">
+                <a16:creationId xmlns:a16="http://schemas.microsoft.com/office/drawing/2014/main" id="{A734C531-1DB4-3BE4-6350-BECC8834D93F}"/>
+              </a:ext>
+            </a:extLst>
+          </p:cNvPr>
+          <p:cNvSpPr/>
+          <p:nvPr/>
+        </p:nvSpPr>
+        <p:spPr>
+          <a:xfrm>
+            <a:off x="4728056" y="1954323"/>
+            <a:ext cx="3925188" cy="696909"/>
+          </a:xfrm>
+          <a:prstGeom prst="roundRect">
+            <a:avLst>
+              <a:gd name="adj" fmla="val 7241"/>
+            </a:avLst>
+          </a:prstGeom>
+          <a:solidFill>
+            <a:srgbClr val="FFC000"/>
+          </a:solidFill>
+        </p:spPr>
+        <p:txBody>
+          <a:bodyPr wrap="square" tIns="54864" bIns="0" rtlCol="0">
+            <a:spAutoFit/>
+          </a:bodyPr>
+          <a:lstStyle/>
+          <a:p>
+            <a:pPr marL="0" marR="0" lvl="0" indent="0" algn="ctr" defTabSz="914400" rtl="0" eaLnBrk="1" fontAlgn="auto" latinLnBrk="0" hangingPunct="1">
+              <a:lnSpc>
+                <a:spcPct val="100000"/>
+              </a:lnSpc>
+              <a:spcBef>
+                <a:spcPts val="0"/>
+              </a:spcBef>
+              <a:spcAft>
+                <a:spcPts val="0"/>
+              </a:spcAft>
+              <a:buClrTx/>
+              <a:buSzTx/>
+              <a:buFontTx/>
+              <a:buNone/>
+              <a:tabLst/>
+              <a:defRPr/>
+            </a:pPr>
+            <a:r>
+              <a:rPr kumimoji="0" lang="en-US" sz="4000" b="0" i="0" u="none" strike="noStrike" kern="1200" cap="none" spc="0" normalizeH="0" baseline="0" noProof="0" dirty="0">
+                <a:ln>
+                  <a:noFill/>
+                </a:ln>
+                <a:effectLst/>
+                <a:uLnTx/>
+                <a:uFillTx/>
+                <a:latin typeface="Bebas Neue" panose="020B0606020202050201" pitchFamily="34" charset="0"/>
+                <a:ea typeface="+mn-ea"/>
+                <a:cs typeface="+mn-cs"/>
+              </a:rPr>
+              <a:t>Select Arduino board</a:t>
+            </a:r>
+          </a:p>
+        </p:txBody>
+      </p:sp>
+    </p:spTree>
+    <p:extLst>
+      <p:ext uri="{BB962C8B-B14F-4D97-AF65-F5344CB8AC3E}">
+        <p14:creationId xmlns:p14="http://schemas.microsoft.com/office/powerpoint/2010/main" val="2825111670"/>
+      </p:ext>
+    </p:extLst>
+  </p:cSld>
+  <p:clrMapOvr>
+    <a:masterClrMapping/>
+  </p:clrMapOvr>
+</p:sld>
+</file>
+
+<file path=ppt/slides/slide11.xml><?xml version="1.0" encoding="utf-8"?>
+<p:sld xmlns:a="http://schemas.openxmlformats.org/drawingml/2006/main" xmlns:r="http://schemas.openxmlformats.org/officeDocument/2006/relationships" xmlns:p="http://schemas.openxmlformats.org/presentationml/2006/main">
+  <p:cSld>
+    <p:spTree>
+      <p:nvGrpSpPr>
+        <p:cNvPr id="1" name="">
+          <a:extLst>
+            <a:ext uri="{FF2B5EF4-FFF2-40B4-BE49-F238E27FC236}">
+              <a16:creationId xmlns:a16="http://schemas.microsoft.com/office/drawing/2014/main" id="{DE0FBFA2-8AD3-B09E-7A3A-7FEDB99B36FC}"/>
+            </a:ext>
+          </a:extLst>
+        </p:cNvPr>
+        <p:cNvGrpSpPr/>
+        <p:nvPr/>
+      </p:nvGrpSpPr>
+      <p:grpSpPr>
+        <a:xfrm>
+          <a:off x="0" y="0"/>
+          <a:ext cx="0" cy="0"/>
+          <a:chOff x="0" y="0"/>
+          <a:chExt cx="0" cy="0"/>
+        </a:xfrm>
+      </p:grpSpPr>
+      <p:pic>
+        <p:nvPicPr>
+          <p:cNvPr id="5" name="Picture 4">
+            <a:extLst>
+              <a:ext uri="{FF2B5EF4-FFF2-40B4-BE49-F238E27FC236}">
+                <a16:creationId xmlns:a16="http://schemas.microsoft.com/office/drawing/2014/main" id="{EE370C96-6CB5-EB4F-4E10-E28A296765C2}"/>
+              </a:ext>
+            </a:extLst>
+          </p:cNvPr>
+          <p:cNvPicPr>
+            <a:picLocks noChangeAspect="1"/>
+          </p:cNvPicPr>
+          <p:nvPr/>
+        </p:nvPicPr>
+        <p:blipFill>
+          <a:blip r:embed="rId2"/>
+          <a:stretch>
+            <a:fillRect/>
+          </a:stretch>
+        </p:blipFill>
+        <p:spPr>
+          <a:xfrm>
+            <a:off x="2221953" y="1564546"/>
+            <a:ext cx="6460733" cy="3825380"/>
+          </a:xfrm>
+          <a:prstGeom prst="rect">
+            <a:avLst/>
+          </a:prstGeom>
+        </p:spPr>
+      </p:pic>
+      <p:cxnSp>
+        <p:nvCxnSpPr>
+          <p:cNvPr id="6" name="Straight Connector 5">
+            <a:extLst>
+              <a:ext uri="{FF2B5EF4-FFF2-40B4-BE49-F238E27FC236}">
+                <a16:creationId xmlns:a16="http://schemas.microsoft.com/office/drawing/2014/main" id="{FCE8A2A5-39D7-185D-0294-91B67BA22C35}"/>
+              </a:ext>
+            </a:extLst>
+          </p:cNvPr>
+          <p:cNvCxnSpPr>
+            <a:cxnSpLocks/>
+          </p:cNvCxnSpPr>
+          <p:nvPr/>
+        </p:nvCxnSpPr>
+        <p:spPr>
+          <a:xfrm flipH="1" flipV="1">
+            <a:off x="4514923" y="2150354"/>
+            <a:ext cx="367382" cy="215342"/>
+          </a:xfrm>
+          <a:prstGeom prst="line">
+            <a:avLst/>
+          </a:prstGeom>
+          <a:ln w="25400">
+            <a:solidFill>
+              <a:srgbClr val="FFC000"/>
+            </a:solidFill>
+            <a:headEnd type="none" w="med" len="med"/>
+            <a:tailEnd type="oval" w="med" len="med"/>
+          </a:ln>
+        </p:spPr>
+        <p:style>
+          <a:lnRef idx="1">
+            <a:schemeClr val="accent1"/>
+          </a:lnRef>
+          <a:fillRef idx="0">
+            <a:schemeClr val="accent1"/>
+          </a:fillRef>
+          <a:effectRef idx="0">
+            <a:schemeClr val="accent1"/>
+          </a:effectRef>
+          <a:fontRef idx="minor">
+            <a:schemeClr val="tx1"/>
+          </a:fontRef>
+        </p:style>
+      </p:cxnSp>
+      <p:sp>
+        <p:nvSpPr>
+          <p:cNvPr id="7" name="Rectangle: Rounded Corners 6">
+            <a:extLst>
+              <a:ext uri="{FF2B5EF4-FFF2-40B4-BE49-F238E27FC236}">
+                <a16:creationId xmlns:a16="http://schemas.microsoft.com/office/drawing/2014/main" id="{76D75CFE-72BF-04F7-1D73-2937F19AA554}"/>
+              </a:ext>
+            </a:extLst>
+          </p:cNvPr>
+          <p:cNvSpPr/>
+          <p:nvPr/>
+        </p:nvSpPr>
+        <p:spPr>
+          <a:xfrm>
+            <a:off x="4728056" y="2145115"/>
+            <a:ext cx="2447219" cy="441162"/>
+          </a:xfrm>
+          <a:prstGeom prst="roundRect">
+            <a:avLst>
+              <a:gd name="adj" fmla="val 7241"/>
+            </a:avLst>
+          </a:prstGeom>
+          <a:solidFill>
+            <a:srgbClr val="FFC000"/>
+          </a:solidFill>
+        </p:spPr>
+        <p:txBody>
+          <a:bodyPr wrap="square" tIns="54864" bIns="0" rtlCol="0">
+            <a:spAutoFit/>
+          </a:bodyPr>
+          <a:lstStyle/>
+          <a:p>
+            <a:pPr marL="0" marR="0" lvl="0" indent="0" algn="ctr" defTabSz="914400" rtl="0" eaLnBrk="1" fontAlgn="auto" latinLnBrk="0" hangingPunct="1">
+              <a:lnSpc>
+                <a:spcPct val="100000"/>
+              </a:lnSpc>
+              <a:spcBef>
+                <a:spcPts val="0"/>
+              </a:spcBef>
+              <a:spcAft>
+                <a:spcPts val="0"/>
+              </a:spcAft>
+              <a:buClrTx/>
+              <a:buSzTx/>
+              <a:buFontTx/>
+              <a:buNone/>
+              <a:tabLst/>
+              <a:defRPr/>
+            </a:pPr>
+            <a:r>
+              <a:rPr kumimoji="0" lang="en-US" sz="2400" b="0" i="0" u="none" strike="noStrike" kern="1200" cap="none" spc="0" normalizeH="0" baseline="0" noProof="0" dirty="0">
+                <a:ln>
+                  <a:noFill/>
+                </a:ln>
+                <a:effectLst/>
+                <a:uLnTx/>
+                <a:uFillTx/>
+                <a:latin typeface="Bebas Neue" panose="020B0606020202050201" pitchFamily="34" charset="0"/>
+                <a:ea typeface="+mn-ea"/>
+                <a:cs typeface="+mn-cs"/>
+              </a:rPr>
+              <a:t>Select Arduino board</a:t>
+            </a:r>
+          </a:p>
+        </p:txBody>
+      </p:sp>
+    </p:spTree>
+    <p:extLst>
+      <p:ext uri="{BB962C8B-B14F-4D97-AF65-F5344CB8AC3E}">
+        <p14:creationId xmlns:p14="http://schemas.microsoft.com/office/powerpoint/2010/main" val="3072860944"/>
+      </p:ext>
+    </p:extLst>
+  </p:cSld>
+  <p:clrMapOvr>
+    <a:masterClrMapping/>
+  </p:clrMapOvr>
+</p:sld>
+</file>
+
+<file path=ppt/slides/slide12.xml><?xml version="1.0" encoding="utf-8"?>
+<p:sld xmlns:a="http://schemas.openxmlformats.org/drawingml/2006/main" xmlns:r="http://schemas.openxmlformats.org/officeDocument/2006/relationships" xmlns:p="http://schemas.openxmlformats.org/presentationml/2006/main">
+  <p:cSld>
+    <p:spTree>
+      <p:nvGrpSpPr>
+        <p:cNvPr id="1" name=""/>
+        <p:cNvGrpSpPr/>
+        <p:nvPr/>
+      </p:nvGrpSpPr>
+      <p:grpSpPr>
+        <a:xfrm>
+          <a:off x="0" y="0"/>
+          <a:ext cx="0" cy="0"/>
+          <a:chOff x="0" y="0"/>
+          <a:chExt cx="0" cy="0"/>
+        </a:xfrm>
+      </p:grpSpPr>
+      <p:pic>
+        <p:nvPicPr>
+          <p:cNvPr id="5" name="Picture 4">
+            <a:extLst>
+              <a:ext uri="{FF2B5EF4-FFF2-40B4-BE49-F238E27FC236}">
+                <a16:creationId xmlns:a16="http://schemas.microsoft.com/office/drawing/2014/main" id="{DCC1F5F1-4F65-4F78-DB4D-571F4A87BD8C}"/>
+              </a:ext>
+            </a:extLst>
+          </p:cNvPr>
+          <p:cNvPicPr>
+            <a:picLocks noChangeAspect="1"/>
+          </p:cNvPicPr>
+          <p:nvPr/>
+        </p:nvPicPr>
+        <p:blipFill>
+          <a:blip r:embed="rId2"/>
+          <a:stretch>
+            <a:fillRect/>
+          </a:stretch>
+        </p:blipFill>
+        <p:spPr>
+          <a:xfrm>
+            <a:off x="471355" y="0"/>
+            <a:ext cx="11249289" cy="6858000"/>
+          </a:xfrm>
+          <a:prstGeom prst="rect">
+            <a:avLst/>
+          </a:prstGeom>
+        </p:spPr>
+      </p:pic>
+    </p:spTree>
+    <p:extLst>
+      <p:ext uri="{BB962C8B-B14F-4D97-AF65-F5344CB8AC3E}">
+        <p14:creationId xmlns:p14="http://schemas.microsoft.com/office/powerpoint/2010/main" val="1387517566"/>
+      </p:ext>
+    </p:extLst>
+  </p:cSld>
+  <p:clrMapOvr>
+    <a:masterClrMapping/>
+  </p:clrMapOvr>
+</p:sld>
+</file>
+
 <file path=ppt/slides/slide2.xml><?xml version="1.0" encoding="utf-8"?>
 <p:sld xmlns:a="http://schemas.openxmlformats.org/drawingml/2006/main" xmlns:r="http://schemas.openxmlformats.org/officeDocument/2006/relationships" xmlns:p="http://schemas.openxmlformats.org/presentationml/2006/main">
   <p:cSld>
@@ -4259,6 +4670,36 @@
           <a:chExt cx="0" cy="0"/>
         </a:xfrm>
       </p:grpSpPr>
+      <p:pic>
+        <p:nvPicPr>
+          <p:cNvPr id="3" name="Picture 2">
+            <a:extLst>
+              <a:ext uri="{FF2B5EF4-FFF2-40B4-BE49-F238E27FC236}">
+                <a16:creationId xmlns:a16="http://schemas.microsoft.com/office/drawing/2014/main" id="{E11A76F6-D521-23BC-E520-8D3E00B8BFAA}"/>
+              </a:ext>
+            </a:extLst>
+          </p:cNvPr>
+          <p:cNvPicPr>
+            <a:picLocks noChangeAspect="1"/>
+          </p:cNvPicPr>
+          <p:nvPr/>
+        </p:nvPicPr>
+        <p:blipFill>
+          <a:blip r:embed="rId2"/>
+          <a:stretch>
+            <a:fillRect/>
+          </a:stretch>
+        </p:blipFill>
+        <p:spPr>
+          <a:xfrm>
+            <a:off x="1295153" y="634856"/>
+            <a:ext cx="9601693" cy="5588287"/>
+          </a:xfrm>
+          <a:prstGeom prst="rect">
+            <a:avLst/>
+          </a:prstGeom>
+        </p:spPr>
+      </p:pic>
     </p:spTree>
     <p:extLst>
       <p:ext uri="{BB962C8B-B14F-4D97-AF65-F5344CB8AC3E}">
